--- a/presentation.pptx
+++ b/presentation.pptx
@@ -9968,6 +9968,22 @@
                 </a:solidFill>
                 <a:latin typeface="Calibri"/>
               </a:rPr>
+              <a:t>›  LangSmith placeholder → every interaction traced live, not a one-off script</a:t>
+            </a:r>
+          </a:p>
+          <a:p>
+            <a:pPr>
+              <a:spcAft>
+                <a:spcPts val="1200"/>
+              </a:spcAft>
+            </a:pPr>
+            <a:r>
+              <a:rPr sz="1400">
+                <a:solidFill>
+                  <a:srgbClr val="232B2A"/>
+                </a:solidFill>
+                <a:latin typeface="Calibri"/>
+              </a:rPr>
               <a:t>›  16 offline unit tests — deterministic logic verified with zero API keys</a:t>
             </a:r>
           </a:p>

--- a/presentation.pptx
+++ b/presentation.pptx
@@ -9984,7 +9984,7 @@
                 </a:solidFill>
                 <a:latin typeface="Calibri"/>
               </a:rPr>
-              <a:t>›  16 offline unit tests — deterministic logic verified with zero API keys</a:t>
+              <a:t>›  20 offline unit tests — deterministic logic verified with zero API keys</a:t>
             </a:r>
           </a:p>
           <a:p>
